--- a/ゲーム科2年/00_前期/ゲーム開発Ⅰ/16_2_Effekseer実装編.pptx
+++ b/ゲーム科2年/00_前期/ゲーム開発Ⅰ/16_2_Effekseer実装編.pptx
@@ -277,7 +277,7 @@
           <a:p>
             <a:fld id="{E9CC885B-4903-4D54-9A93-00025F12DED9}" type="datetimeFigureOut">
               <a:rPr kumimoji="1" lang="ja-JP" altLang="en-US" smtClean="0"/>
-              <a:t>2024/11/25</a:t>
+              <a:t>2025/4/22</a:t>
             </a:fld>
             <a:endParaRPr kumimoji="1" lang="ja-JP" altLang="en-US"/>
           </a:p>
@@ -507,7 +507,7 @@
           <a:p>
             <a:fld id="{E9CC885B-4903-4D54-9A93-00025F12DED9}" type="datetimeFigureOut">
               <a:rPr kumimoji="1" lang="ja-JP" altLang="en-US" smtClean="0"/>
-              <a:t>2024/11/25</a:t>
+              <a:t>2025/4/22</a:t>
             </a:fld>
             <a:endParaRPr kumimoji="1" lang="ja-JP" altLang="en-US"/>
           </a:p>
@@ -747,7 +747,7 @@
           <a:p>
             <a:fld id="{E9CC885B-4903-4D54-9A93-00025F12DED9}" type="datetimeFigureOut">
               <a:rPr kumimoji="1" lang="ja-JP" altLang="en-US" smtClean="0"/>
-              <a:t>2024/11/25</a:t>
+              <a:t>2025/4/22</a:t>
             </a:fld>
             <a:endParaRPr kumimoji="1" lang="ja-JP" altLang="en-US"/>
           </a:p>
@@ -977,7 +977,7 @@
           <a:p>
             <a:fld id="{E9CC885B-4903-4D54-9A93-00025F12DED9}" type="datetimeFigureOut">
               <a:rPr kumimoji="1" lang="ja-JP" altLang="en-US" smtClean="0"/>
-              <a:t>2024/11/25</a:t>
+              <a:t>2025/4/22</a:t>
             </a:fld>
             <a:endParaRPr kumimoji="1" lang="ja-JP" altLang="en-US"/>
           </a:p>
@@ -1252,7 +1252,7 @@
           <a:p>
             <a:fld id="{E9CC885B-4903-4D54-9A93-00025F12DED9}" type="datetimeFigureOut">
               <a:rPr kumimoji="1" lang="ja-JP" altLang="en-US" smtClean="0"/>
-              <a:t>2024/11/25</a:t>
+              <a:t>2025/4/22</a:t>
             </a:fld>
             <a:endParaRPr kumimoji="1" lang="ja-JP" altLang="en-US"/>
           </a:p>
@@ -1581,7 +1581,7 @@
           <a:p>
             <a:fld id="{E9CC885B-4903-4D54-9A93-00025F12DED9}" type="datetimeFigureOut">
               <a:rPr kumimoji="1" lang="ja-JP" altLang="en-US" smtClean="0"/>
-              <a:t>2024/11/25</a:t>
+              <a:t>2025/4/22</a:t>
             </a:fld>
             <a:endParaRPr kumimoji="1" lang="ja-JP" altLang="en-US"/>
           </a:p>
@@ -2057,7 +2057,7 @@
           <a:p>
             <a:fld id="{E9CC885B-4903-4D54-9A93-00025F12DED9}" type="datetimeFigureOut">
               <a:rPr kumimoji="1" lang="ja-JP" altLang="en-US" smtClean="0"/>
-              <a:t>2024/11/25</a:t>
+              <a:t>2025/4/22</a:t>
             </a:fld>
             <a:endParaRPr kumimoji="1" lang="ja-JP" altLang="en-US"/>
           </a:p>
@@ -2198,7 +2198,7 @@
           <a:p>
             <a:fld id="{E9CC885B-4903-4D54-9A93-00025F12DED9}" type="datetimeFigureOut">
               <a:rPr kumimoji="1" lang="ja-JP" altLang="en-US" smtClean="0"/>
-              <a:t>2024/11/25</a:t>
+              <a:t>2025/4/22</a:t>
             </a:fld>
             <a:endParaRPr kumimoji="1" lang="ja-JP" altLang="en-US"/>
           </a:p>
@@ -2311,7 +2311,7 @@
           <a:p>
             <a:fld id="{E9CC885B-4903-4D54-9A93-00025F12DED9}" type="datetimeFigureOut">
               <a:rPr kumimoji="1" lang="ja-JP" altLang="en-US" smtClean="0"/>
-              <a:t>2024/11/25</a:t>
+              <a:t>2025/4/22</a:t>
             </a:fld>
             <a:endParaRPr kumimoji="1" lang="ja-JP" altLang="en-US"/>
           </a:p>
@@ -2654,7 +2654,7 @@
           <a:p>
             <a:fld id="{E9CC885B-4903-4D54-9A93-00025F12DED9}" type="datetimeFigureOut">
               <a:rPr kumimoji="1" lang="ja-JP" altLang="en-US" smtClean="0"/>
-              <a:t>2024/11/25</a:t>
+              <a:t>2025/4/22</a:t>
             </a:fld>
             <a:endParaRPr kumimoji="1" lang="ja-JP" altLang="en-US"/>
           </a:p>
@@ -2942,7 +2942,7 @@
           <a:p>
             <a:fld id="{E9CC885B-4903-4D54-9A93-00025F12DED9}" type="datetimeFigureOut">
               <a:rPr kumimoji="1" lang="ja-JP" altLang="en-US" smtClean="0"/>
-              <a:t>2024/11/25</a:t>
+              <a:t>2025/4/22</a:t>
             </a:fld>
             <a:endParaRPr kumimoji="1" lang="ja-JP" altLang="en-US"/>
           </a:p>
@@ -3215,7 +3215,7 @@
           <a:p>
             <a:fld id="{E9CC885B-4903-4D54-9A93-00025F12DED9}" type="datetimeFigureOut">
               <a:rPr kumimoji="1" lang="ja-JP" altLang="en-US" smtClean="0"/>
-              <a:t>2024/11/25</a:t>
+              <a:t>2025/4/22</a:t>
             </a:fld>
             <a:endParaRPr kumimoji="1" lang="ja-JP" altLang="en-US"/>
           </a:p>
@@ -4538,10 +4538,10 @@
       </p:sp>
       <p:pic>
         <p:nvPicPr>
-          <p:cNvPr id="3" name="図 2">
-            <a:extLst>
-              <a:ext uri="{FF2B5EF4-FFF2-40B4-BE49-F238E27FC236}">
-                <a16:creationId xmlns:a16="http://schemas.microsoft.com/office/drawing/2014/main" id="{A5EE2131-5AAA-456D-A332-EFEB279F50E3}"/>
+          <p:cNvPr id="5" name="図 4">
+            <a:extLst>
+              <a:ext uri="{FF2B5EF4-FFF2-40B4-BE49-F238E27FC236}">
+                <a16:creationId xmlns:a16="http://schemas.microsoft.com/office/drawing/2014/main" id="{6CA163C5-0887-4A13-A2C7-A22DAF908CBA}"/>
               </a:ext>
             </a:extLst>
           </p:cNvPr>
@@ -4558,8 +4558,8 @@
         </p:blipFill>
         <p:spPr>
           <a:xfrm>
-            <a:off x="567542" y="1817795"/>
-            <a:ext cx="6774535" cy="4548252"/>
+            <a:off x="567542" y="1817794"/>
+            <a:ext cx="7142105" cy="4845986"/>
           </a:xfrm>
           <a:prstGeom prst="rect">
             <a:avLst/>
@@ -4678,10 +4678,10 @@
       </p:sp>
       <p:pic>
         <p:nvPicPr>
-          <p:cNvPr id="8" name="図 7">
-            <a:extLst>
-              <a:ext uri="{FF2B5EF4-FFF2-40B4-BE49-F238E27FC236}">
-                <a16:creationId xmlns:a16="http://schemas.microsoft.com/office/drawing/2014/main" id="{F799BA3E-C8CC-4907-9613-15F7D8224B19}"/>
+          <p:cNvPr id="3" name="図 2">
+            <a:extLst>
+              <a:ext uri="{FF2B5EF4-FFF2-40B4-BE49-F238E27FC236}">
+                <a16:creationId xmlns:a16="http://schemas.microsoft.com/office/drawing/2014/main" id="{A4AECD6E-12EB-4F64-9EFD-DC9CF748223E}"/>
               </a:ext>
             </a:extLst>
           </p:cNvPr>
@@ -4699,7 +4699,7 @@
         <p:spPr>
           <a:xfrm>
             <a:off x="567542" y="1817794"/>
-            <a:ext cx="6916991" cy="4576105"/>
+            <a:ext cx="7697917" cy="4335229"/>
           </a:xfrm>
           <a:prstGeom prst="rect">
             <a:avLst/>
